--- a/sorting_algorithms/Insertion Sort.pptx
+++ b/sorting_algorithms/Insertion Sort.pptx
@@ -5,7 +5,7 @@
     <p:sldMasterId id="2147483648" r:id="rId4"/>
   </p:sldMasterIdLst>
   <p:notesMasterIdLst>
-    <p:notesMasterId r:id="rId12"/>
+    <p:notesMasterId r:id="rId13"/>
   </p:notesMasterIdLst>
   <p:sldIdLst>
     <p:sldId id="272" r:id="rId5"/>
@@ -15,6 +15,7 @@
     <p:sldId id="279" r:id="rId9"/>
     <p:sldId id="280" r:id="rId10"/>
     <p:sldId id="281" r:id="rId11"/>
+    <p:sldId id="282" r:id="rId12"/>
   </p:sldIdLst>
   <p:sldSz cx="12192000" cy="6858000"/>
   <p:notesSz cx="6858000" cy="9144000"/>
@@ -211,7 +212,7 @@
           <a:p>
             <a:fld id="{F666E1FD-E7A0-497B-BBC0-740BAAC97C64}" type="datetimeFigureOut">
               <a:rPr lang="en-PH" smtClean="0"/>
-              <a:t>06/07/2026</a:t>
+              <a:t>14/07/2026</a:t>
             </a:fld>
             <a:endParaRPr lang="en-PH"/>
           </a:p>
@@ -1067,6 +1068,114 @@
 </p:notes>
 </file>
 
+<file path=ppt/notesSlides/notesSlide8.xml><?xml version="1.0" encoding="utf-8"?>
+<p:notes xmlns:a="http://schemas.openxmlformats.org/drawingml/2006/main" xmlns:r="http://schemas.openxmlformats.org/officeDocument/2006/relationships" xmlns:p="http://schemas.openxmlformats.org/presentationml/2006/main">
+  <p:cSld>
+    <p:spTree>
+      <p:nvGrpSpPr>
+        <p:cNvPr id="1" name="">
+          <a:extLst>
+            <a:ext uri="{FF2B5EF4-FFF2-40B4-BE49-F238E27FC236}">
+              <a16:creationId xmlns:a16="http://schemas.microsoft.com/office/drawing/2014/main" id="{289E161C-8637-B88F-CE96-73F5AA8A165D}"/>
+            </a:ext>
+          </a:extLst>
+        </p:cNvPr>
+        <p:cNvGrpSpPr/>
+        <p:nvPr/>
+      </p:nvGrpSpPr>
+      <p:grpSpPr>
+        <a:xfrm>
+          <a:off x="0" y="0"/>
+          <a:ext cx="0" cy="0"/>
+          <a:chOff x="0" y="0"/>
+          <a:chExt cx="0" cy="0"/>
+        </a:xfrm>
+      </p:grpSpPr>
+      <p:sp>
+        <p:nvSpPr>
+          <p:cNvPr id="2" name="Slide Image Placeholder 1">
+            <a:extLst>
+              <a:ext uri="{FF2B5EF4-FFF2-40B4-BE49-F238E27FC236}">
+                <a16:creationId xmlns:a16="http://schemas.microsoft.com/office/drawing/2014/main" id="{FCB8AB97-E164-1D71-6B0F-9A2A61B2FB81}"/>
+              </a:ext>
+            </a:extLst>
+          </p:cNvPr>
+          <p:cNvSpPr>
+            <a:spLocks noGrp="1" noRot="1" noChangeAspect="1"/>
+          </p:cNvSpPr>
+          <p:nvPr>
+            <p:ph type="sldImg"/>
+          </p:nvPr>
+        </p:nvSpPr>
+        <p:spPr/>
+      </p:sp>
+      <p:sp>
+        <p:nvSpPr>
+          <p:cNvPr id="3" name="Notes Placeholder 2">
+            <a:extLst>
+              <a:ext uri="{FF2B5EF4-FFF2-40B4-BE49-F238E27FC236}">
+                <a16:creationId xmlns:a16="http://schemas.microsoft.com/office/drawing/2014/main" id="{A7004E8E-2BFA-AF0C-6D07-A27FD9250260}"/>
+              </a:ext>
+            </a:extLst>
+          </p:cNvPr>
+          <p:cNvSpPr>
+            <a:spLocks noGrp="1"/>
+          </p:cNvSpPr>
+          <p:nvPr>
+            <p:ph type="body" idx="1"/>
+          </p:nvPr>
+        </p:nvSpPr>
+        <p:spPr/>
+        <p:txBody>
+          <a:bodyPr/>
+          <a:lstStyle/>
+          <a:p>
+            <a:endParaRPr lang="en-PH" dirty="0"/>
+          </a:p>
+        </p:txBody>
+      </p:sp>
+      <p:sp>
+        <p:nvSpPr>
+          <p:cNvPr id="4" name="Slide Number Placeholder 3">
+            <a:extLst>
+              <a:ext uri="{FF2B5EF4-FFF2-40B4-BE49-F238E27FC236}">
+                <a16:creationId xmlns:a16="http://schemas.microsoft.com/office/drawing/2014/main" id="{747C94CD-5428-B94A-5447-DE1A01787566}"/>
+              </a:ext>
+            </a:extLst>
+          </p:cNvPr>
+          <p:cNvSpPr>
+            <a:spLocks noGrp="1"/>
+          </p:cNvSpPr>
+          <p:nvPr>
+            <p:ph type="sldNum" sz="quarter" idx="5"/>
+          </p:nvPr>
+        </p:nvSpPr>
+        <p:spPr/>
+        <p:txBody>
+          <a:bodyPr/>
+          <a:lstStyle/>
+          <a:p>
+            <a:fld id="{FE90CCE9-4AAE-4E1F-85AD-521A406D6524}" type="slidenum">
+              <a:rPr lang="en-PH" smtClean="0"/>
+              <a:t>8</a:t>
+            </a:fld>
+            <a:endParaRPr lang="en-PH"/>
+          </a:p>
+        </p:txBody>
+      </p:sp>
+    </p:spTree>
+    <p:extLst>
+      <p:ext uri="{BB962C8B-B14F-4D97-AF65-F5344CB8AC3E}">
+        <p14:creationId xmlns:p14="http://schemas.microsoft.com/office/powerpoint/2010/main" val="3115918872"/>
+      </p:ext>
+    </p:extLst>
+  </p:cSld>
+  <p:clrMapOvr>
+    <a:masterClrMapping/>
+  </p:clrMapOvr>
+</p:notes>
+</file>
+
 <file path=ppt/slideLayouts/slideLayout1.xml><?xml version="1.0" encoding="utf-8"?>
 <p:sldLayout xmlns:a="http://schemas.openxmlformats.org/drawingml/2006/main" xmlns:r="http://schemas.openxmlformats.org/officeDocument/2006/relationships" xmlns:p="http://schemas.openxmlformats.org/presentationml/2006/main" type="title" preserve="1">
   <p:cSld name="Title Slide">
@@ -1216,7 +1325,7 @@
           <a:p>
             <a:fld id="{0CCF0B81-6BD8-4C65-9459-815598C5F1F4}" type="datetimeFigureOut">
               <a:rPr lang="en-PH" smtClean="0"/>
-              <a:t>06/07/2026</a:t>
+              <a:t>14/07/2026</a:t>
             </a:fld>
             <a:endParaRPr lang="en-PH"/>
           </a:p>
@@ -1416,7 +1525,7 @@
           <a:p>
             <a:fld id="{0CCF0B81-6BD8-4C65-9459-815598C5F1F4}" type="datetimeFigureOut">
               <a:rPr lang="en-PH" smtClean="0"/>
-              <a:t>06/07/2026</a:t>
+              <a:t>14/07/2026</a:t>
             </a:fld>
             <a:endParaRPr lang="en-PH"/>
           </a:p>
@@ -1626,7 +1735,7 @@
           <a:p>
             <a:fld id="{0CCF0B81-6BD8-4C65-9459-815598C5F1F4}" type="datetimeFigureOut">
               <a:rPr lang="en-PH" smtClean="0"/>
-              <a:t>06/07/2026</a:t>
+              <a:t>14/07/2026</a:t>
             </a:fld>
             <a:endParaRPr lang="en-PH"/>
           </a:p>
@@ -1826,7 +1935,7 @@
           <a:p>
             <a:fld id="{0CCF0B81-6BD8-4C65-9459-815598C5F1F4}" type="datetimeFigureOut">
               <a:rPr lang="en-PH" smtClean="0"/>
-              <a:t>06/07/2026</a:t>
+              <a:t>14/07/2026</a:t>
             </a:fld>
             <a:endParaRPr lang="en-PH"/>
           </a:p>
@@ -2102,7 +2211,7 @@
           <a:p>
             <a:fld id="{0CCF0B81-6BD8-4C65-9459-815598C5F1F4}" type="datetimeFigureOut">
               <a:rPr lang="en-PH" smtClean="0"/>
-              <a:t>06/07/2026</a:t>
+              <a:t>14/07/2026</a:t>
             </a:fld>
             <a:endParaRPr lang="en-PH"/>
           </a:p>
@@ -2370,7 +2479,7 @@
           <a:p>
             <a:fld id="{0CCF0B81-6BD8-4C65-9459-815598C5F1F4}" type="datetimeFigureOut">
               <a:rPr lang="en-PH" smtClean="0"/>
-              <a:t>06/07/2026</a:t>
+              <a:t>14/07/2026</a:t>
             </a:fld>
             <a:endParaRPr lang="en-PH"/>
           </a:p>
@@ -2785,7 +2894,7 @@
           <a:p>
             <a:fld id="{0CCF0B81-6BD8-4C65-9459-815598C5F1F4}" type="datetimeFigureOut">
               <a:rPr lang="en-PH" smtClean="0"/>
-              <a:t>06/07/2026</a:t>
+              <a:t>14/07/2026</a:t>
             </a:fld>
             <a:endParaRPr lang="en-PH"/>
           </a:p>
@@ -2927,7 +3036,7 @@
           <a:p>
             <a:fld id="{0CCF0B81-6BD8-4C65-9459-815598C5F1F4}" type="datetimeFigureOut">
               <a:rPr lang="en-PH" smtClean="0"/>
-              <a:t>06/07/2026</a:t>
+              <a:t>14/07/2026</a:t>
             </a:fld>
             <a:endParaRPr lang="en-PH"/>
           </a:p>
@@ -3040,7 +3149,7 @@
           <a:p>
             <a:fld id="{0CCF0B81-6BD8-4C65-9459-815598C5F1F4}" type="datetimeFigureOut">
               <a:rPr lang="en-PH" smtClean="0"/>
-              <a:t>06/07/2026</a:t>
+              <a:t>14/07/2026</a:t>
             </a:fld>
             <a:endParaRPr lang="en-PH"/>
           </a:p>
@@ -3353,7 +3462,7 @@
           <a:p>
             <a:fld id="{0CCF0B81-6BD8-4C65-9459-815598C5F1F4}" type="datetimeFigureOut">
               <a:rPr lang="en-PH" smtClean="0"/>
-              <a:t>06/07/2026</a:t>
+              <a:t>14/07/2026</a:t>
             </a:fld>
             <a:endParaRPr lang="en-PH"/>
           </a:p>
@@ -3642,7 +3751,7 @@
           <a:p>
             <a:fld id="{0CCF0B81-6BD8-4C65-9459-815598C5F1F4}" type="datetimeFigureOut">
               <a:rPr lang="en-PH" smtClean="0"/>
-              <a:t>06/07/2026</a:t>
+              <a:t>14/07/2026</a:t>
             </a:fld>
             <a:endParaRPr lang="en-PH"/>
           </a:p>
@@ -3885,7 +3994,7 @@
           <a:p>
             <a:fld id="{0CCF0B81-6BD8-4C65-9459-815598C5F1F4}" type="datetimeFigureOut">
               <a:rPr lang="en-PH" smtClean="0"/>
-              <a:t>06/07/2026</a:t>
+              <a:t>14/07/2026</a:t>
             </a:fld>
             <a:endParaRPr lang="en-PH"/>
           </a:p>
@@ -7489,6 +7598,1097 @@
     </p:tnLst>
     <p:bldLst>
       <p:bldP spid="6" grpId="0" animBg="1"/>
+    </p:bldLst>
+  </p:timing>
+</p:sld>
+</file>
+
+<file path=ppt/slides/slide8.xml><?xml version="1.0" encoding="utf-8"?>
+<p:sld xmlns:a="http://schemas.openxmlformats.org/drawingml/2006/main" xmlns:r="http://schemas.openxmlformats.org/officeDocument/2006/relationships" xmlns:p="http://schemas.openxmlformats.org/presentationml/2006/main">
+  <p:cSld>
+    <p:bg>
+      <p:bgPr>
+        <a:solidFill>
+          <a:schemeClr val="bg1"/>
+        </a:solidFill>
+        <a:effectLst/>
+      </p:bgPr>
+    </p:bg>
+    <p:spTree>
+      <p:nvGrpSpPr>
+        <p:cNvPr id="1" name="">
+          <a:extLst>
+            <a:ext uri="{FF2B5EF4-FFF2-40B4-BE49-F238E27FC236}">
+              <a16:creationId xmlns:a16="http://schemas.microsoft.com/office/drawing/2014/main" id="{27993288-AEF0-0BF0-2AF1-A31E118125B0}"/>
+            </a:ext>
+          </a:extLst>
+        </p:cNvPr>
+        <p:cNvGrpSpPr/>
+        <p:nvPr/>
+      </p:nvGrpSpPr>
+      <p:grpSpPr>
+        <a:xfrm>
+          <a:off x="0" y="0"/>
+          <a:ext cx="0" cy="0"/>
+          <a:chOff x="0" y="0"/>
+          <a:chExt cx="0" cy="0"/>
+        </a:xfrm>
+      </p:grpSpPr>
+      <p:cxnSp>
+        <p:nvCxnSpPr>
+          <p:cNvPr id="12" name="Straight Arrow Connector 11">
+            <a:extLst>
+              <a:ext uri="{FF2B5EF4-FFF2-40B4-BE49-F238E27FC236}">
+                <a16:creationId xmlns:a16="http://schemas.microsoft.com/office/drawing/2014/main" id="{B19905DA-E7F9-C9FC-42D9-9A5459A5B658}"/>
+              </a:ext>
+            </a:extLst>
+          </p:cNvPr>
+          <p:cNvCxnSpPr/>
+          <p:nvPr/>
+        </p:nvCxnSpPr>
+        <p:spPr>
+          <a:xfrm>
+            <a:off x="1968500" y="5486400"/>
+            <a:ext cx="8020050" cy="0"/>
+          </a:xfrm>
+          <a:prstGeom prst="straightConnector1">
+            <a:avLst/>
+          </a:prstGeom>
+          <a:ln w="76200">
+            <a:solidFill>
+              <a:schemeClr val="tx1"/>
+            </a:solidFill>
+            <a:tailEnd type="triangle"/>
+          </a:ln>
+        </p:spPr>
+        <p:style>
+          <a:lnRef idx="1">
+            <a:schemeClr val="accent1"/>
+          </a:lnRef>
+          <a:fillRef idx="0">
+            <a:schemeClr val="accent1"/>
+          </a:fillRef>
+          <a:effectRef idx="0">
+            <a:schemeClr val="accent1"/>
+          </a:effectRef>
+          <a:fontRef idx="minor">
+            <a:schemeClr val="tx1"/>
+          </a:fontRef>
+        </p:style>
+      </p:cxnSp>
+      <p:cxnSp>
+        <p:nvCxnSpPr>
+          <p:cNvPr id="13" name="Straight Arrow Connector 12">
+            <a:extLst>
+              <a:ext uri="{FF2B5EF4-FFF2-40B4-BE49-F238E27FC236}">
+                <a16:creationId xmlns:a16="http://schemas.microsoft.com/office/drawing/2014/main" id="{C03541D8-54A7-C8E0-3B99-F0E7B57E2401}"/>
+              </a:ext>
+            </a:extLst>
+          </p:cNvPr>
+          <p:cNvCxnSpPr>
+            <a:cxnSpLocks/>
+          </p:cNvCxnSpPr>
+          <p:nvPr/>
+        </p:nvCxnSpPr>
+        <p:spPr>
+          <a:xfrm flipV="1">
+            <a:off x="1968500" y="327025"/>
+            <a:ext cx="0" cy="5197475"/>
+          </a:xfrm>
+          <a:prstGeom prst="straightConnector1">
+            <a:avLst/>
+          </a:prstGeom>
+          <a:ln w="76200">
+            <a:solidFill>
+              <a:schemeClr val="tx1"/>
+            </a:solidFill>
+            <a:tailEnd type="triangle"/>
+          </a:ln>
+        </p:spPr>
+        <p:style>
+          <a:lnRef idx="1">
+            <a:schemeClr val="accent1"/>
+          </a:lnRef>
+          <a:fillRef idx="0">
+            <a:schemeClr val="accent1"/>
+          </a:fillRef>
+          <a:effectRef idx="0">
+            <a:schemeClr val="accent1"/>
+          </a:effectRef>
+          <a:fontRef idx="minor">
+            <a:schemeClr val="tx1"/>
+          </a:fontRef>
+        </p:style>
+      </p:cxnSp>
+      <p:sp>
+        <p:nvSpPr>
+          <p:cNvPr id="14" name="TextBox 13">
+            <a:extLst>
+              <a:ext uri="{FF2B5EF4-FFF2-40B4-BE49-F238E27FC236}">
+                <a16:creationId xmlns:a16="http://schemas.microsoft.com/office/drawing/2014/main" id="{36AAE8DB-EC92-78E3-A066-01C6A912BE27}"/>
+              </a:ext>
+            </a:extLst>
+          </p:cNvPr>
+          <p:cNvSpPr txBox="1"/>
+          <p:nvPr/>
+        </p:nvSpPr>
+        <p:spPr>
+          <a:xfrm>
+            <a:off x="5321935" y="5652964"/>
+            <a:ext cx="1313180" cy="707886"/>
+          </a:xfrm>
+          <a:prstGeom prst="rect">
+            <a:avLst/>
+          </a:prstGeom>
+          <a:noFill/>
+        </p:spPr>
+        <p:txBody>
+          <a:bodyPr wrap="none" rtlCol="0">
+            <a:spAutoFit/>
+          </a:bodyPr>
+          <a:lstStyle/>
+          <a:p>
+            <a:r>
+              <a:rPr lang="en-PH" sz="4000" b="1" dirty="0">
+                <a:latin typeface="Consolas" panose="020B0609020204030204" pitchFamily="49" charset="0"/>
+              </a:rPr>
+              <a:t>data</a:t>
+            </a:r>
+          </a:p>
+        </p:txBody>
+      </p:sp>
+      <p:sp>
+        <p:nvSpPr>
+          <p:cNvPr id="15" name="TextBox 14">
+            <a:extLst>
+              <a:ext uri="{FF2B5EF4-FFF2-40B4-BE49-F238E27FC236}">
+                <a16:creationId xmlns:a16="http://schemas.microsoft.com/office/drawing/2014/main" id="{2A05D701-7358-49A2-B696-3D72852585BA}"/>
+              </a:ext>
+            </a:extLst>
+          </p:cNvPr>
+          <p:cNvSpPr txBox="1"/>
+          <p:nvPr/>
+        </p:nvSpPr>
+        <p:spPr>
+          <a:xfrm rot="5400000" flipH="1">
+            <a:off x="513467" y="2571819"/>
+            <a:ext cx="1313180" cy="707886"/>
+          </a:xfrm>
+          <a:prstGeom prst="rect">
+            <a:avLst/>
+          </a:prstGeom>
+          <a:noFill/>
+        </p:spPr>
+        <p:txBody>
+          <a:bodyPr wrap="none" rtlCol="0">
+            <a:spAutoFit/>
+          </a:bodyPr>
+          <a:lstStyle/>
+          <a:p>
+            <a:r>
+              <a:rPr lang="en-PH" sz="4000" b="1" dirty="0">
+                <a:latin typeface="Consolas" panose="020B0609020204030204" pitchFamily="49" charset="0"/>
+              </a:rPr>
+              <a:t>time</a:t>
+            </a:r>
+          </a:p>
+        </p:txBody>
+      </p:sp>
+      <p:cxnSp>
+        <p:nvCxnSpPr>
+          <p:cNvPr id="16" name="Straight Arrow Connector 15">
+            <a:extLst>
+              <a:ext uri="{FF2B5EF4-FFF2-40B4-BE49-F238E27FC236}">
+                <a16:creationId xmlns:a16="http://schemas.microsoft.com/office/drawing/2014/main" id="{46E18FD3-47D2-95CF-D069-8899251E160A}"/>
+              </a:ext>
+            </a:extLst>
+          </p:cNvPr>
+          <p:cNvCxnSpPr>
+            <a:cxnSpLocks/>
+          </p:cNvCxnSpPr>
+          <p:nvPr/>
+        </p:nvCxnSpPr>
+        <p:spPr>
+          <a:xfrm flipV="1">
+            <a:off x="1968500" y="2125981"/>
+            <a:ext cx="5925820" cy="3322320"/>
+          </a:xfrm>
+          <a:prstGeom prst="straightConnector1">
+            <a:avLst/>
+          </a:prstGeom>
+          <a:ln w="76200">
+            <a:solidFill>
+              <a:srgbClr val="FFFF00"/>
+            </a:solidFill>
+            <a:tailEnd type="none"/>
+          </a:ln>
+        </p:spPr>
+        <p:style>
+          <a:lnRef idx="1">
+            <a:schemeClr val="accent1"/>
+          </a:lnRef>
+          <a:fillRef idx="0">
+            <a:schemeClr val="accent1"/>
+          </a:fillRef>
+          <a:effectRef idx="0">
+            <a:schemeClr val="accent1"/>
+          </a:effectRef>
+          <a:fontRef idx="minor">
+            <a:schemeClr val="tx1"/>
+          </a:fontRef>
+        </p:style>
+      </p:cxnSp>
+      <p:sp>
+        <p:nvSpPr>
+          <p:cNvPr id="17" name="Arc 16">
+            <a:extLst>
+              <a:ext uri="{FF2B5EF4-FFF2-40B4-BE49-F238E27FC236}">
+                <a16:creationId xmlns:a16="http://schemas.microsoft.com/office/drawing/2014/main" id="{8E9382A2-2392-4D0E-D3C0-611023B8BBBA}"/>
+              </a:ext>
+            </a:extLst>
+          </p:cNvPr>
+          <p:cNvSpPr/>
+          <p:nvPr/>
+        </p:nvSpPr>
+        <p:spPr>
+          <a:xfrm rot="16200000">
+            <a:off x="7532684" y="-1535115"/>
+            <a:ext cx="2933704" cy="13852525"/>
+          </a:xfrm>
+          <a:prstGeom prst="arc">
+            <a:avLst>
+              <a:gd name="adj1" fmla="val 16200000"/>
+              <a:gd name="adj2" fmla="val 228024"/>
+            </a:avLst>
+          </a:prstGeom>
+          <a:ln w="76200">
+            <a:solidFill>
+              <a:srgbClr val="92D050"/>
+            </a:solidFill>
+          </a:ln>
+        </p:spPr>
+        <p:style>
+          <a:lnRef idx="1">
+            <a:schemeClr val="accent1"/>
+          </a:lnRef>
+          <a:fillRef idx="0">
+            <a:schemeClr val="accent1"/>
+          </a:fillRef>
+          <a:effectRef idx="0">
+            <a:schemeClr val="accent1"/>
+          </a:effectRef>
+          <a:fontRef idx="minor">
+            <a:schemeClr val="tx1"/>
+          </a:fontRef>
+        </p:style>
+        <p:txBody>
+          <a:bodyPr rtlCol="0" anchor="ctr"/>
+          <a:lstStyle/>
+          <a:p>
+            <a:pPr algn="ctr"/>
+            <a:endParaRPr lang="en-PH"/>
+          </a:p>
+        </p:txBody>
+      </p:sp>
+      <p:sp>
+        <p:nvSpPr>
+          <p:cNvPr id="18" name="TextBox 17">
+            <a:extLst>
+              <a:ext uri="{FF2B5EF4-FFF2-40B4-BE49-F238E27FC236}">
+                <a16:creationId xmlns:a16="http://schemas.microsoft.com/office/drawing/2014/main" id="{D3DCA024-C385-FF44-6965-CAB317981D3A}"/>
+              </a:ext>
+            </a:extLst>
+          </p:cNvPr>
+          <p:cNvSpPr txBox="1"/>
+          <p:nvPr/>
+        </p:nvSpPr>
+        <p:spPr>
+          <a:xfrm>
+            <a:off x="8179435" y="1667966"/>
+            <a:ext cx="1313180" cy="707886"/>
+          </a:xfrm>
+          <a:prstGeom prst="rect">
+            <a:avLst/>
+          </a:prstGeom>
+          <a:noFill/>
+        </p:spPr>
+        <p:txBody>
+          <a:bodyPr wrap="none" rtlCol="0">
+            <a:spAutoFit/>
+          </a:bodyPr>
+          <a:lstStyle/>
+          <a:p>
+            <a:r>
+              <a:rPr lang="en-PH" sz="4000" b="1" dirty="0">
+                <a:solidFill>
+                  <a:srgbClr val="FFFF00"/>
+                </a:solidFill>
+                <a:latin typeface="Consolas" panose="020B0609020204030204" pitchFamily="49" charset="0"/>
+              </a:rPr>
+              <a:t>O(n)</a:t>
+            </a:r>
+          </a:p>
+        </p:txBody>
+      </p:sp>
+      <p:sp>
+        <p:nvSpPr>
+          <p:cNvPr id="19" name="TextBox 18">
+            <a:extLst>
+              <a:ext uri="{FF2B5EF4-FFF2-40B4-BE49-F238E27FC236}">
+                <a16:creationId xmlns:a16="http://schemas.microsoft.com/office/drawing/2014/main" id="{78732F35-4089-22A4-CFCE-042DD200DCE6}"/>
+              </a:ext>
+            </a:extLst>
+          </p:cNvPr>
+          <p:cNvSpPr txBox="1"/>
+          <p:nvPr/>
+        </p:nvSpPr>
+        <p:spPr>
+          <a:xfrm>
+            <a:off x="9447153" y="3489146"/>
+            <a:ext cx="2441694" cy="707886"/>
+          </a:xfrm>
+          <a:prstGeom prst="rect">
+            <a:avLst/>
+          </a:prstGeom>
+          <a:noFill/>
+        </p:spPr>
+        <p:txBody>
+          <a:bodyPr wrap="none" rtlCol="0">
+            <a:spAutoFit/>
+          </a:bodyPr>
+          <a:lstStyle/>
+          <a:p>
+            <a:r>
+              <a:rPr lang="en-PH" sz="4000" b="1" dirty="0">
+                <a:solidFill>
+                  <a:srgbClr val="92D050"/>
+                </a:solidFill>
+                <a:latin typeface="Consolas" panose="020B0609020204030204" pitchFamily="49" charset="0"/>
+              </a:rPr>
+              <a:t>O(log n)</a:t>
+            </a:r>
+          </a:p>
+        </p:txBody>
+      </p:sp>
+      <p:sp>
+        <p:nvSpPr>
+          <p:cNvPr id="20" name="Freeform: Shape 19">
+            <a:extLst>
+              <a:ext uri="{FF2B5EF4-FFF2-40B4-BE49-F238E27FC236}">
+                <a16:creationId xmlns:a16="http://schemas.microsoft.com/office/drawing/2014/main" id="{7524C390-FF43-242F-328E-122275993B0F}"/>
+              </a:ext>
+            </a:extLst>
+          </p:cNvPr>
+          <p:cNvSpPr/>
+          <p:nvPr/>
+        </p:nvSpPr>
+        <p:spPr>
+          <a:xfrm>
+            <a:off x="2134419" y="721801"/>
+            <a:ext cx="4856961" cy="4675239"/>
+          </a:xfrm>
+          <a:custGeom>
+            <a:avLst/>
+            <a:gdLst>
+              <a:gd name="csX0" fmla="*/ 0 w 4856961"/>
+              <a:gd name="csY0" fmla="*/ 4675239 h 4675239"/>
+              <a:gd name="csX1" fmla="*/ 4100052 w 4856961"/>
+              <a:gd name="csY1" fmla="*/ 1932039 h 4675239"/>
+              <a:gd name="csX2" fmla="*/ 4844846 w 4856961"/>
+              <a:gd name="csY2" fmla="*/ 0 h 4675239"/>
+            </a:gdLst>
+            <a:ahLst/>
+            <a:cxnLst>
+              <a:cxn ang="0">
+                <a:pos x="csX0" y="csY0"/>
+              </a:cxn>
+              <a:cxn ang="0">
+                <a:pos x="csX1" y="csY1"/>
+              </a:cxn>
+              <a:cxn ang="0">
+                <a:pos x="csX2" y="csY2"/>
+              </a:cxn>
+            </a:cxnLst>
+            <a:rect l="l" t="t" r="r" b="b"/>
+            <a:pathLst>
+              <a:path w="4856961" h="4675239">
+                <a:moveTo>
+                  <a:pt x="0" y="4675239"/>
+                </a:moveTo>
+                <a:cubicBezTo>
+                  <a:pt x="1646289" y="3693242"/>
+                  <a:pt x="3292578" y="2711245"/>
+                  <a:pt x="4100052" y="1932039"/>
+                </a:cubicBezTo>
+                <a:cubicBezTo>
+                  <a:pt x="4907526" y="1152833"/>
+                  <a:pt x="4876186" y="576416"/>
+                  <a:pt x="4844846" y="0"/>
+                </a:cubicBezTo>
+              </a:path>
+            </a:pathLst>
+          </a:custGeom>
+          <a:noFill/>
+          <a:ln w="76200">
+            <a:solidFill>
+              <a:srgbClr val="FFC000"/>
+            </a:solidFill>
+          </a:ln>
+        </p:spPr>
+        <p:style>
+          <a:lnRef idx="2">
+            <a:schemeClr val="accent1">
+              <a:shade val="15000"/>
+            </a:schemeClr>
+          </a:lnRef>
+          <a:fillRef idx="1">
+            <a:schemeClr val="accent1"/>
+          </a:fillRef>
+          <a:effectRef idx="0">
+            <a:schemeClr val="accent1"/>
+          </a:effectRef>
+          <a:fontRef idx="minor">
+            <a:schemeClr val="lt1"/>
+          </a:fontRef>
+        </p:style>
+        <p:txBody>
+          <a:bodyPr rtlCol="0" anchor="ctr"/>
+          <a:lstStyle/>
+          <a:p>
+            <a:pPr algn="ctr"/>
+            <a:endParaRPr lang="en-PH"/>
+          </a:p>
+        </p:txBody>
+      </p:sp>
+      <p:sp>
+        <p:nvSpPr>
+          <p:cNvPr id="21" name="TextBox 20">
+            <a:extLst>
+              <a:ext uri="{FF2B5EF4-FFF2-40B4-BE49-F238E27FC236}">
+                <a16:creationId xmlns:a16="http://schemas.microsoft.com/office/drawing/2014/main" id="{DBA9E396-A6F6-0895-355B-02726DDD070E}"/>
+              </a:ext>
+            </a:extLst>
+          </p:cNvPr>
+          <p:cNvSpPr txBox="1"/>
+          <p:nvPr/>
+        </p:nvSpPr>
+        <p:spPr>
+          <a:xfrm>
+            <a:off x="7106498" y="148493"/>
+            <a:ext cx="3005951" cy="707886"/>
+          </a:xfrm>
+          <a:prstGeom prst="rect">
+            <a:avLst/>
+          </a:prstGeom>
+          <a:noFill/>
+        </p:spPr>
+        <p:txBody>
+          <a:bodyPr wrap="none" rtlCol="0">
+            <a:spAutoFit/>
+          </a:bodyPr>
+          <a:lstStyle/>
+          <a:p>
+            <a:r>
+              <a:rPr lang="en-PH" sz="4000" b="1" dirty="0">
+                <a:solidFill>
+                  <a:srgbClr val="FFC000"/>
+                </a:solidFill>
+                <a:latin typeface="Consolas" panose="020B0609020204030204" pitchFamily="49" charset="0"/>
+              </a:rPr>
+              <a:t>O(n log n)</a:t>
+            </a:r>
+          </a:p>
+        </p:txBody>
+      </p:sp>
+      <p:sp>
+        <p:nvSpPr>
+          <p:cNvPr id="22" name="Freeform: Shape 21">
+            <a:extLst>
+              <a:ext uri="{FF2B5EF4-FFF2-40B4-BE49-F238E27FC236}">
+                <a16:creationId xmlns:a16="http://schemas.microsoft.com/office/drawing/2014/main" id="{D1D1C1DC-43DE-C824-7A99-B592D54ED2AC}"/>
+              </a:ext>
+            </a:extLst>
+          </p:cNvPr>
+          <p:cNvSpPr/>
+          <p:nvPr/>
+        </p:nvSpPr>
+        <p:spPr>
+          <a:xfrm>
+            <a:off x="2007843" y="549919"/>
+            <a:ext cx="2034578" cy="4942875"/>
+          </a:xfrm>
+          <a:custGeom>
+            <a:avLst/>
+            <a:gdLst>
+              <a:gd name="csX0" fmla="*/ 0 w 2034578"/>
+              <a:gd name="csY0" fmla="*/ 4942875 h 4942875"/>
+              <a:gd name="csX1" fmla="*/ 1796828 w 2034578"/>
+              <a:gd name="csY1" fmla="*/ 2276408 h 4942875"/>
+              <a:gd name="csX2" fmla="*/ 1963083 w 2034578"/>
+              <a:gd name="csY2" fmla="*/ 0 h 4942875"/>
+            </a:gdLst>
+            <a:ahLst/>
+            <a:cxnLst>
+              <a:cxn ang="0">
+                <a:pos x="csX0" y="csY0"/>
+              </a:cxn>
+              <a:cxn ang="0">
+                <a:pos x="csX1" y="csY1"/>
+              </a:cxn>
+              <a:cxn ang="0">
+                <a:pos x="csX2" y="csY2"/>
+              </a:cxn>
+            </a:cxnLst>
+            <a:rect l="l" t="t" r="r" b="b"/>
+            <a:pathLst>
+              <a:path w="2034578" h="4942875">
+                <a:moveTo>
+                  <a:pt x="0" y="4942875"/>
+                </a:moveTo>
+                <a:cubicBezTo>
+                  <a:pt x="734824" y="4021547"/>
+                  <a:pt x="1469648" y="3100220"/>
+                  <a:pt x="1796828" y="2276408"/>
+                </a:cubicBezTo>
+                <a:cubicBezTo>
+                  <a:pt x="2124008" y="1452596"/>
+                  <a:pt x="2043545" y="726298"/>
+                  <a:pt x="1963083" y="0"/>
+                </a:cubicBezTo>
+              </a:path>
+            </a:pathLst>
+          </a:custGeom>
+          <a:noFill/>
+          <a:ln w="76200">
+            <a:solidFill>
+              <a:srgbClr val="FF6600"/>
+            </a:solidFill>
+          </a:ln>
+        </p:spPr>
+        <p:style>
+          <a:lnRef idx="2">
+            <a:schemeClr val="accent1">
+              <a:shade val="15000"/>
+            </a:schemeClr>
+          </a:lnRef>
+          <a:fillRef idx="1">
+            <a:schemeClr val="accent1"/>
+          </a:fillRef>
+          <a:effectRef idx="0">
+            <a:schemeClr val="accent1"/>
+          </a:effectRef>
+          <a:fontRef idx="minor">
+            <a:schemeClr val="lt1"/>
+          </a:fontRef>
+        </p:style>
+        <p:txBody>
+          <a:bodyPr rtlCol="0" anchor="ctr"/>
+          <a:lstStyle/>
+          <a:p>
+            <a:pPr algn="ctr"/>
+            <a:endParaRPr lang="en-PH"/>
+          </a:p>
+        </p:txBody>
+      </p:sp>
+      <mc:AlternateContent xmlns:mc="http://schemas.openxmlformats.org/markup-compatibility/2006">
+        <mc:Choice xmlns:a14="http://schemas.microsoft.com/office/drawing/2010/main" Requires="a14">
+          <p:sp>
+            <p:nvSpPr>
+              <p:cNvPr id="23" name="TextBox 22">
+                <a:extLst>
+                  <a:ext uri="{FF2B5EF4-FFF2-40B4-BE49-F238E27FC236}">
+                    <a16:creationId xmlns:a16="http://schemas.microsoft.com/office/drawing/2014/main" id="{5D0B2892-ED9C-49FE-EB7D-ABF7E0D57065}"/>
+                  </a:ext>
+                </a:extLst>
+              </p:cNvPr>
+              <p:cNvSpPr txBox="1"/>
+              <p:nvPr/>
+            </p:nvSpPr>
+            <p:spPr>
+              <a:xfrm>
+                <a:off x="4042421" y="0"/>
+                <a:ext cx="1608582" cy="721801"/>
+              </a:xfrm>
+              <a:prstGeom prst="rect">
+                <a:avLst/>
+              </a:prstGeom>
+              <a:noFill/>
+            </p:spPr>
+            <p:txBody>
+              <a:bodyPr wrap="none" rtlCol="0">
+                <a:spAutoFit/>
+              </a:bodyPr>
+              <a:lstStyle/>
+              <a:p>
+                <a:r>
+                  <a:rPr lang="en-PH" sz="4000" b="1" dirty="0">
+                    <a:solidFill>
+                      <a:srgbClr val="FF6600"/>
+                    </a:solidFill>
+                    <a:latin typeface="Consolas" panose="020B0609020204030204" pitchFamily="49" charset="0"/>
+                  </a:rPr>
+                  <a:t>O(</a:t>
+                </a:r>
+                <a14:m>
+                  <m:oMath xmlns:m="http://schemas.openxmlformats.org/officeDocument/2006/math">
+                    <m:sSup>
+                      <m:sSupPr>
+                        <m:ctrlPr>
+                          <a:rPr lang="en-PH" sz="4000" b="1" i="1" smtClean="0">
+                            <a:solidFill>
+                              <a:srgbClr val="FF6600"/>
+                            </a:solidFill>
+                            <a:latin typeface="Cambria Math" panose="02040503050406030204" pitchFamily="18" charset="0"/>
+                          </a:rPr>
+                        </m:ctrlPr>
+                      </m:sSupPr>
+                      <m:e>
+                        <m:r>
+                          <a:rPr lang="en-PH" sz="4000" b="1" i="1" smtClean="0">
+                            <a:solidFill>
+                              <a:srgbClr val="FF6600"/>
+                            </a:solidFill>
+                            <a:latin typeface="Cambria Math" panose="02040503050406030204" pitchFamily="18" charset="0"/>
+                          </a:rPr>
+                          <m:t>𝒏</m:t>
+                        </m:r>
+                      </m:e>
+                      <m:sup>
+                        <m:r>
+                          <a:rPr lang="en-PH" sz="4000" b="1" i="1" smtClean="0">
+                            <a:solidFill>
+                              <a:srgbClr val="FF6600"/>
+                            </a:solidFill>
+                            <a:latin typeface="Cambria Math" panose="02040503050406030204" pitchFamily="18" charset="0"/>
+                          </a:rPr>
+                          <m:t>𝟐</m:t>
+                        </m:r>
+                      </m:sup>
+                    </m:sSup>
+                  </m:oMath>
+                </a14:m>
+                <a:r>
+                  <a:rPr lang="en-PH" sz="4000" b="1" dirty="0">
+                    <a:solidFill>
+                      <a:srgbClr val="FF6600"/>
+                    </a:solidFill>
+                    <a:latin typeface="Consolas" panose="020B0609020204030204" pitchFamily="49" charset="0"/>
+                  </a:rPr>
+                  <a:t>)</a:t>
+                </a:r>
+              </a:p>
+            </p:txBody>
+          </p:sp>
+        </mc:Choice>
+        <mc:Fallback>
+          <p:sp>
+            <p:nvSpPr>
+              <p:cNvPr id="23" name="TextBox 22">
+                <a:extLst>
+                  <a:ext uri="{FF2B5EF4-FFF2-40B4-BE49-F238E27FC236}">
+                    <a16:creationId xmlns:a16="http://schemas.microsoft.com/office/drawing/2014/main" id="{5D0B2892-ED9C-49FE-EB7D-ABF7E0D57065}"/>
+                  </a:ext>
+                </a:extLst>
+              </p:cNvPr>
+              <p:cNvSpPr txBox="1">
+                <a:spLocks noRot="1" noChangeAspect="1" noMove="1" noResize="1" noEditPoints="1" noAdjustHandles="1" noChangeArrowheads="1" noChangeShapeType="1" noTextEdit="1"/>
+              </p:cNvSpPr>
+              <p:nvPr/>
+            </p:nvSpPr>
+            <p:spPr>
+              <a:xfrm>
+                <a:off x="4042421" y="0"/>
+                <a:ext cx="1608582" cy="721801"/>
+              </a:xfrm>
+              <a:prstGeom prst="rect">
+                <a:avLst/>
+              </a:prstGeom>
+              <a:blipFill>
+                <a:blip r:embed="rId3"/>
+                <a:stretch>
+                  <a:fillRect l="-13258" t="-12712" r="-12500" b="-36441"/>
+                </a:stretch>
+              </a:blipFill>
+            </p:spPr>
+            <p:txBody>
+              <a:bodyPr/>
+              <a:lstStyle/>
+              <a:p>
+                <a:r>
+                  <a:rPr lang="en-PH">
+                    <a:noFill/>
+                  </a:rPr>
+                  <a:t> </a:t>
+                </a:r>
+              </a:p>
+            </p:txBody>
+          </p:sp>
+        </mc:Fallback>
+      </mc:AlternateContent>
+      <mc:AlternateContent xmlns:mc="http://schemas.openxmlformats.org/markup-compatibility/2006">
+        <mc:Choice xmlns:a14="http://schemas.microsoft.com/office/drawing/2010/main" Requires="a14">
+          <p:sp>
+            <p:nvSpPr>
+              <p:cNvPr id="24" name="TextBox 23">
+                <a:extLst>
+                  <a:ext uri="{FF2B5EF4-FFF2-40B4-BE49-F238E27FC236}">
+                    <a16:creationId xmlns:a16="http://schemas.microsoft.com/office/drawing/2014/main" id="{8F78667C-2355-F2F6-F3A6-751FA8A35B20}"/>
+                  </a:ext>
+                </a:extLst>
+              </p:cNvPr>
+              <p:cNvSpPr txBox="1"/>
+              <p:nvPr/>
+            </p:nvSpPr>
+            <p:spPr>
+              <a:xfrm>
+                <a:off x="4077495" y="627358"/>
+                <a:ext cx="2426177" cy="1036630"/>
+              </a:xfrm>
+              <a:prstGeom prst="rect">
+                <a:avLst/>
+              </a:prstGeom>
+              <a:noFill/>
+            </p:spPr>
+            <p:txBody>
+              <a:bodyPr wrap="none" rtlCol="0">
+                <a:spAutoFit/>
+              </a:bodyPr>
+              <a:lstStyle/>
+              <a:p>
+                <a:r>
+                  <a:rPr lang="en-PH" sz="1500" b="1" dirty="0">
+                    <a:solidFill>
+                      <a:srgbClr val="FF6600"/>
+                    </a:solidFill>
+                    <a:latin typeface="Consolas" panose="020B0609020204030204" pitchFamily="49" charset="0"/>
+                  </a:rPr>
+                  <a:t>O(</a:t>
+                </a:r>
+                <a14:m>
+                  <m:oMath xmlns:m="http://schemas.openxmlformats.org/officeDocument/2006/math">
+                    <m:sSup>
+                      <m:sSupPr>
+                        <m:ctrlPr>
+                          <a:rPr lang="en-PH" sz="1500" b="1" i="1">
+                            <a:solidFill>
+                              <a:srgbClr val="FF6600"/>
+                            </a:solidFill>
+                            <a:latin typeface="Cambria Math" panose="02040503050406030204" pitchFamily="18" charset="0"/>
+                          </a:rPr>
+                        </m:ctrlPr>
+                      </m:sSupPr>
+                      <m:e>
+                        <m:r>
+                          <a:rPr lang="en-PH" sz="1500" b="1" i="1">
+                            <a:solidFill>
+                              <a:srgbClr val="FF6600"/>
+                            </a:solidFill>
+                            <a:latin typeface="Cambria Math" panose="02040503050406030204" pitchFamily="18" charset="0"/>
+                          </a:rPr>
+                          <m:t>𝒏</m:t>
+                        </m:r>
+                      </m:e>
+                      <m:sup>
+                        <m:r>
+                          <a:rPr lang="en-PH" sz="1500" b="1" i="1">
+                            <a:solidFill>
+                              <a:srgbClr val="FF6600"/>
+                            </a:solidFill>
+                            <a:latin typeface="Cambria Math" panose="02040503050406030204" pitchFamily="18" charset="0"/>
+                          </a:rPr>
+                          <m:t>𝟐</m:t>
+                        </m:r>
+                      </m:sup>
+                    </m:sSup>
+                  </m:oMath>
+                </a14:m>
+                <a:r>
+                  <a:rPr lang="en-PH" sz="1500" b="1" dirty="0">
+                    <a:solidFill>
+                      <a:srgbClr val="FF6600"/>
+                    </a:solidFill>
+                    <a:latin typeface="Consolas" panose="020B0609020204030204" pitchFamily="49" charset="0"/>
+                  </a:rPr>
+                  <a:t>)= quadratic time</a:t>
+                </a:r>
+              </a:p>
+              <a:p>
+                <a:pPr marL="285750" indent="-285750">
+                  <a:buFont typeface="Arial" panose="020B0604020202020204" pitchFamily="34" charset="0"/>
+                  <a:buChar char="•"/>
+                </a:pPr>
+                <a:r>
+                  <a:rPr lang="en-PH" sz="1500" b="1" dirty="0">
+                    <a:solidFill>
+                      <a:srgbClr val="FF6600"/>
+                    </a:solidFill>
+                    <a:latin typeface="Consolas" panose="020B0609020204030204" pitchFamily="49" charset="0"/>
+                  </a:rPr>
+                  <a:t>Insertion sort</a:t>
+                </a:r>
+              </a:p>
+              <a:p>
+                <a:pPr marL="285750" indent="-285750">
+                  <a:buFont typeface="Arial" panose="020B0604020202020204" pitchFamily="34" charset="0"/>
+                  <a:buChar char="•"/>
+                </a:pPr>
+                <a:r>
+                  <a:rPr lang="en-PH" sz="1500" b="1" dirty="0">
+                    <a:solidFill>
+                      <a:srgbClr val="FF6600"/>
+                    </a:solidFill>
+                    <a:latin typeface="Consolas" panose="020B0609020204030204" pitchFamily="49" charset="0"/>
+                  </a:rPr>
+                  <a:t>Selection sort</a:t>
+                </a:r>
+              </a:p>
+              <a:p>
+                <a:pPr marL="285750" indent="-285750">
+                  <a:buFont typeface="Arial" panose="020B0604020202020204" pitchFamily="34" charset="0"/>
+                  <a:buChar char="•"/>
+                </a:pPr>
+                <a:r>
+                  <a:rPr lang="en-PH" sz="1500" b="1" dirty="0">
+                    <a:solidFill>
+                      <a:srgbClr val="FF6600"/>
+                    </a:solidFill>
+                    <a:latin typeface="Consolas" panose="020B0609020204030204" pitchFamily="49" charset="0"/>
+                  </a:rPr>
+                  <a:t>Bubble sort</a:t>
+                </a:r>
+              </a:p>
+            </p:txBody>
+          </p:sp>
+        </mc:Choice>
+        <mc:Fallback>
+          <p:sp>
+            <p:nvSpPr>
+              <p:cNvPr id="24" name="TextBox 23">
+                <a:extLst>
+                  <a:ext uri="{FF2B5EF4-FFF2-40B4-BE49-F238E27FC236}">
+                    <a16:creationId xmlns:a16="http://schemas.microsoft.com/office/drawing/2014/main" id="{8F78667C-2355-F2F6-F3A6-751FA8A35B20}"/>
+                  </a:ext>
+                </a:extLst>
+              </p:cNvPr>
+              <p:cNvSpPr txBox="1">
+                <a:spLocks noRot="1" noChangeAspect="1" noMove="1" noResize="1" noEditPoints="1" noAdjustHandles="1" noChangeArrowheads="1" noChangeShapeType="1" noTextEdit="1"/>
+              </p:cNvSpPr>
+              <p:nvPr/>
+            </p:nvSpPr>
+            <p:spPr>
+              <a:xfrm>
+                <a:off x="4077495" y="627358"/>
+                <a:ext cx="2426177" cy="1036630"/>
+              </a:xfrm>
+              <a:prstGeom prst="rect">
+                <a:avLst/>
+              </a:prstGeom>
+              <a:blipFill>
+                <a:blip r:embed="rId4"/>
+                <a:stretch>
+                  <a:fillRect l="-1005" b="-4118"/>
+                </a:stretch>
+              </a:blipFill>
+            </p:spPr>
+            <p:txBody>
+              <a:bodyPr/>
+              <a:lstStyle/>
+              <a:p>
+                <a:r>
+                  <a:rPr lang="en-PH">
+                    <a:noFill/>
+                  </a:rPr>
+                  <a:t> </a:t>
+                </a:r>
+              </a:p>
+            </p:txBody>
+          </p:sp>
+        </mc:Fallback>
+      </mc:AlternateContent>
+    </p:spTree>
+    <p:extLst>
+      <p:ext uri="{BB962C8B-B14F-4D97-AF65-F5344CB8AC3E}">
+        <p14:creationId xmlns:p14="http://schemas.microsoft.com/office/powerpoint/2010/main" val="1710011202"/>
+      </p:ext>
+    </p:extLst>
+  </p:cSld>
+  <p:clrMapOvr>
+    <a:masterClrMapping/>
+  </p:clrMapOvr>
+  <p:timing>
+    <p:tnLst>
+      <p:par>
+        <p:cTn id="1" dur="indefinite" restart="never" nodeType="tmRoot">
+          <p:childTnLst>
+            <p:seq concurrent="1" nextAc="seek">
+              <p:cTn id="2" dur="indefinite" nodeType="mainSeq">
+                <p:childTnLst>
+                  <p:par>
+                    <p:cTn id="3" fill="hold">
+                      <p:stCondLst>
+                        <p:cond delay="indefinite"/>
+                      </p:stCondLst>
+                      <p:childTnLst>
+                        <p:par>
+                          <p:cTn id="4" fill="hold">
+                            <p:stCondLst>
+                              <p:cond delay="0"/>
+                            </p:stCondLst>
+                            <p:childTnLst>
+                              <p:par>
+                                <p:cTn id="5" presetID="22" presetClass="entr" presetSubtype="4" fill="hold" grpId="0" nodeType="clickEffect">
+                                  <p:stCondLst>
+                                    <p:cond delay="0"/>
+                                  </p:stCondLst>
+                                  <p:childTnLst>
+                                    <p:set>
+                                      <p:cBhvr>
+                                        <p:cTn id="6" dur="1" fill="hold">
+                                          <p:stCondLst>
+                                            <p:cond delay="0"/>
+                                          </p:stCondLst>
+                                        </p:cTn>
+                                        <p:tgtEl>
+                                          <p:spTgt spid="22"/>
+                                        </p:tgtEl>
+                                        <p:attrNameLst>
+                                          <p:attrName>style.visibility</p:attrName>
+                                        </p:attrNameLst>
+                                      </p:cBhvr>
+                                      <p:to>
+                                        <p:strVal val="visible"/>
+                                      </p:to>
+                                    </p:set>
+                                    <p:animEffect transition="in" filter="wipe(down)">
+                                      <p:cBhvr>
+                                        <p:cTn id="7" dur="500"/>
+                                        <p:tgtEl>
+                                          <p:spTgt spid="22"/>
+                                        </p:tgtEl>
+                                      </p:cBhvr>
+                                    </p:animEffect>
+                                  </p:childTnLst>
+                                </p:cTn>
+                              </p:par>
+                            </p:childTnLst>
+                          </p:cTn>
+                        </p:par>
+                      </p:childTnLst>
+                    </p:cTn>
+                  </p:par>
+                  <p:par>
+                    <p:cTn id="8" fill="hold">
+                      <p:stCondLst>
+                        <p:cond delay="indefinite"/>
+                      </p:stCondLst>
+                      <p:childTnLst>
+                        <p:par>
+                          <p:cTn id="9" fill="hold">
+                            <p:stCondLst>
+                              <p:cond delay="0"/>
+                            </p:stCondLst>
+                            <p:childTnLst>
+                              <p:par>
+                                <p:cTn id="10" presetID="10" presetClass="entr" presetSubtype="0" fill="hold" grpId="0" nodeType="clickEffect">
+                                  <p:stCondLst>
+                                    <p:cond delay="0"/>
+                                  </p:stCondLst>
+                                  <p:childTnLst>
+                                    <p:set>
+                                      <p:cBhvr>
+                                        <p:cTn id="11" dur="1" fill="hold">
+                                          <p:stCondLst>
+                                            <p:cond delay="0"/>
+                                          </p:stCondLst>
+                                        </p:cTn>
+                                        <p:tgtEl>
+                                          <p:spTgt spid="23"/>
+                                        </p:tgtEl>
+                                        <p:attrNameLst>
+                                          <p:attrName>style.visibility</p:attrName>
+                                        </p:attrNameLst>
+                                      </p:cBhvr>
+                                      <p:to>
+                                        <p:strVal val="visible"/>
+                                      </p:to>
+                                    </p:set>
+                                    <p:animEffect transition="in" filter="fade">
+                                      <p:cBhvr>
+                                        <p:cTn id="12" dur="500"/>
+                                        <p:tgtEl>
+                                          <p:spTgt spid="23"/>
+                                        </p:tgtEl>
+                                      </p:cBhvr>
+                                    </p:animEffect>
+                                  </p:childTnLst>
+                                </p:cTn>
+                              </p:par>
+                              <p:par>
+                                <p:cTn id="13" presetID="10" presetClass="entr" presetSubtype="0" fill="hold" grpId="0" nodeType="withEffect">
+                                  <p:stCondLst>
+                                    <p:cond delay="0"/>
+                                  </p:stCondLst>
+                                  <p:childTnLst>
+                                    <p:set>
+                                      <p:cBhvr>
+                                        <p:cTn id="14" dur="1" fill="hold">
+                                          <p:stCondLst>
+                                            <p:cond delay="0"/>
+                                          </p:stCondLst>
+                                        </p:cTn>
+                                        <p:tgtEl>
+                                          <p:spTgt spid="24"/>
+                                        </p:tgtEl>
+                                        <p:attrNameLst>
+                                          <p:attrName>style.visibility</p:attrName>
+                                        </p:attrNameLst>
+                                      </p:cBhvr>
+                                      <p:to>
+                                        <p:strVal val="visible"/>
+                                      </p:to>
+                                    </p:set>
+                                    <p:animEffect transition="in" filter="fade">
+                                      <p:cBhvr>
+                                        <p:cTn id="15" dur="500"/>
+                                        <p:tgtEl>
+                                          <p:spTgt spid="24"/>
+                                        </p:tgtEl>
+                                      </p:cBhvr>
+                                    </p:animEffect>
+                                  </p:childTnLst>
+                                </p:cTn>
+                              </p:par>
+                            </p:childTnLst>
+                          </p:cTn>
+                        </p:par>
+                      </p:childTnLst>
+                    </p:cTn>
+                  </p:par>
+                </p:childTnLst>
+              </p:cTn>
+              <p:prevCondLst>
+                <p:cond evt="onPrev" delay="0">
+                  <p:tgtEl>
+                    <p:sldTgt/>
+                  </p:tgtEl>
+                </p:cond>
+              </p:prevCondLst>
+              <p:nextCondLst>
+                <p:cond evt="onNext" delay="0">
+                  <p:tgtEl>
+                    <p:sldTgt/>
+                  </p:tgtEl>
+                </p:cond>
+              </p:nextCondLst>
+            </p:seq>
+          </p:childTnLst>
+        </p:cTn>
+      </p:par>
+    </p:tnLst>
+    <p:bldLst>
+      <p:bldP spid="22" grpId="0" animBg="1"/>
+      <p:bldP spid="23" grpId="0"/>
+      <p:bldP spid="24" grpId="0"/>
     </p:bldLst>
   </p:timing>
 </p:sld>
@@ -8217,18 +9417,18 @@
 </file>
 
 <file path=customXml/item2.xml><?xml version="1.0" encoding="utf-8"?>
+<p:properties xmlns:p="http://schemas.microsoft.com/office/2006/metadata/properties" xmlns:xsi="http://www.w3.org/2001/XMLSchema-instance" xmlns:pc="http://schemas.microsoft.com/office/infopath/2007/PartnerControls">
+  <documentManagement/>
+</p:properties>
+</file>
+
+<file path=customXml/item3.xml><?xml version="1.0" encoding="utf-8"?>
 <?mso-contentType ?>
 <FormTemplates xmlns="http://schemas.microsoft.com/sharepoint/v3/contenttype/forms">
   <Display>DocumentLibraryForm</Display>
   <Edit>DocumentLibraryForm</Edit>
   <New>DocumentLibraryForm</New>
 </FormTemplates>
-</file>
-
-<file path=customXml/item3.xml><?xml version="1.0" encoding="utf-8"?>
-<p:properties xmlns:p="http://schemas.microsoft.com/office/2006/metadata/properties" xmlns:xsi="http://www.w3.org/2001/XMLSchema-instance" xmlns:pc="http://schemas.microsoft.com/office/infopath/2007/PartnerControls">
-  <documentManagement/>
-</p:properties>
 </file>
 
 <file path=customXml/itemProps1.xml><?xml version="1.0" encoding="utf-8"?>
@@ -8250,18 +9450,18 @@
 </file>
 
 <file path=customXml/itemProps2.xml><?xml version="1.0" encoding="utf-8"?>
-<ds:datastoreItem xmlns:ds="http://schemas.openxmlformats.org/officeDocument/2006/customXml" ds:itemID="{651370AF-26B9-4AFA-BA9D-5D4A7E1A6722}">
-  <ds:schemaRefs>
-    <ds:schemaRef ds:uri="http://schemas.microsoft.com/sharepoint/v3/contenttype/forms"/>
-  </ds:schemaRefs>
-</ds:datastoreItem>
-</file>
-
-<file path=customXml/itemProps3.xml><?xml version="1.0" encoding="utf-8"?>
 <ds:datastoreItem xmlns:ds="http://schemas.openxmlformats.org/officeDocument/2006/customXml" ds:itemID="{EA3362E2-FA54-4262-AE94-2FA98FF8142D}">
   <ds:schemaRefs>
     <ds:schemaRef ds:uri="http://schemas.microsoft.com/office/2006/metadata/properties"/>
     <ds:schemaRef ds:uri="http://schemas.microsoft.com/office/infopath/2007/PartnerControls"/>
   </ds:schemaRefs>
 </ds:datastoreItem>
+</file>
+
+<file path=customXml/itemProps3.xml><?xml version="1.0" encoding="utf-8"?>
+<ds:datastoreItem xmlns:ds="http://schemas.openxmlformats.org/officeDocument/2006/customXml" ds:itemID="{651370AF-26B9-4AFA-BA9D-5D4A7E1A6722}">
+  <ds:schemaRefs>
+    <ds:schemaRef ds:uri="http://schemas.microsoft.com/sharepoint/v3/contenttype/forms"/>
+  </ds:schemaRefs>
+</ds:datastoreItem>
 </file>
--- a/sorting_algorithms/Insertion Sort.pptx
+++ b/sorting_algorithms/Insertion Sort.pptx
@@ -4400,7 +4400,7 @@
     <p:bg>
       <p:bgPr>
         <a:solidFill>
-          <a:schemeClr val="bg1"/>
+          <a:schemeClr val="tx1"/>
         </a:solidFill>
         <a:effectLst/>
       </p:bgPr>
@@ -4448,10 +4448,18 @@
           <a:lstStyle/>
           <a:p>
             <a:r>
-              <a:rPr lang="en-US" b="1" dirty="0"/>
+              <a:rPr lang="en-US" b="1" dirty="0">
+                <a:solidFill>
+                  <a:srgbClr val="00B050"/>
+                </a:solidFill>
+              </a:rPr>
               <a:t>What is Insertion Sort?</a:t>
             </a:r>
-            <a:endParaRPr lang="en-PH" b="1" dirty="0"/>
+            <a:endParaRPr lang="en-PH" b="1" dirty="0">
+              <a:solidFill>
+                <a:srgbClr val="00B050"/>
+              </a:solidFill>
+            </a:endParaRPr>
           </a:p>
         </p:txBody>
       </p:sp>
@@ -4577,6 +4585,9 @@
             <a:pPr algn="l"/>
             <a:r>
               <a:rPr lang="en-US" sz="2700" dirty="0">
+                <a:solidFill>
+                  <a:schemeClr val="bg1"/>
+                </a:solidFill>
                 <a:latin typeface="Calibri (Body)"/>
               </a:rPr>
               <a:t>Insertion sort is a sorting algorithm that places an unsorted element at its suitable place in each iteration.</a:t>
@@ -4585,6 +4596,9 @@
           <a:p>
             <a:pPr algn="l"/>
             <a:endParaRPr lang="en-US" sz="2700" dirty="0">
+              <a:solidFill>
+                <a:schemeClr val="bg1"/>
+              </a:solidFill>
               <a:latin typeface="Calibri (Body)"/>
             </a:endParaRPr>
           </a:p>
@@ -4593,7 +4607,7 @@
             <a:r>
               <a:rPr lang="en-US" sz="2700" b="0" i="1" dirty="0">
                 <a:solidFill>
-                  <a:srgbClr val="273239"/>
+                  <a:schemeClr val="bg1"/>
                 </a:solidFill>
                 <a:effectLst/>
                 <a:latin typeface="Calibri (Body)"/>
@@ -4603,7 +4617,7 @@
             <a:r>
               <a:rPr lang="en-US" sz="2700" b="1" i="1" dirty="0">
                 <a:solidFill>
-                  <a:srgbClr val="00B050"/>
+                  <a:schemeClr val="bg1"/>
                 </a:solidFill>
                 <a:effectLst/>
                 <a:latin typeface="Calibri (Body)"/>
@@ -4613,7 +4627,7 @@
             <a:r>
               <a:rPr lang="en-US" sz="2700" b="0" i="1" dirty="0">
                 <a:solidFill>
-                  <a:srgbClr val="273239"/>
+                  <a:schemeClr val="bg1"/>
                 </a:solidFill>
                 <a:effectLst/>
                 <a:latin typeface="Calibri (Body)"/>
@@ -4623,7 +4637,7 @@
             <a:r>
               <a:rPr lang="en-US" sz="2700" b="1" i="1" dirty="0">
                 <a:solidFill>
-                  <a:srgbClr val="FF0000"/>
+                  <a:schemeClr val="bg1"/>
                 </a:solidFill>
                 <a:effectLst/>
                 <a:latin typeface="Calibri (Body)"/>
@@ -4633,7 +4647,7 @@
             <a:r>
               <a:rPr lang="en-US" sz="2700" b="0" i="1" dirty="0">
                 <a:solidFill>
-                  <a:srgbClr val="273239"/>
+                  <a:schemeClr val="bg1"/>
                 </a:solidFill>
                 <a:effectLst/>
                 <a:latin typeface="Calibri (Body)"/>
@@ -4641,6 +4655,9 @@
               <a:t>. Values from the unsorted part are picked and placed at the correct position in the sorted part.</a:t>
             </a:r>
             <a:endParaRPr lang="en-US" sz="2700" dirty="0">
+              <a:solidFill>
+                <a:schemeClr val="bg1"/>
+              </a:solidFill>
               <a:latin typeface="Calibri (Body)"/>
             </a:endParaRPr>
           </a:p>
@@ -4674,7 +4691,7 @@
         </p:blipFill>
         <p:spPr>
           <a:xfrm>
-            <a:off x="3319136" y="3163235"/>
+            <a:off x="3319136" y="3429000"/>
             <a:ext cx="4762500" cy="2857500"/>
           </a:xfrm>
           <a:prstGeom prst="rect">
@@ -4701,7 +4718,7 @@
     <p:bg>
       <p:bgPr>
         <a:solidFill>
-          <a:schemeClr val="bg1"/>
+          <a:schemeClr val="tx1"/>
         </a:solidFill>
         <a:effectLst/>
       </p:bgPr>
@@ -4749,10 +4766,18 @@
           <a:lstStyle/>
           <a:p>
             <a:r>
-              <a:rPr lang="en-US" b="1" dirty="0"/>
+              <a:rPr lang="en-US" b="1" dirty="0">
+                <a:solidFill>
+                  <a:srgbClr val="00B050"/>
+                </a:solidFill>
+              </a:rPr>
               <a:t>Insertion Sort</a:t>
             </a:r>
-            <a:endParaRPr lang="en-PH" b="1" dirty="0"/>
+            <a:endParaRPr lang="en-PH" b="1" dirty="0">
+              <a:solidFill>
+                <a:srgbClr val="00B050"/>
+              </a:solidFill>
+            </a:endParaRPr>
           </a:p>
         </p:txBody>
       </p:sp>
@@ -5131,7 +5156,7 @@
     <p:bg>
       <p:bgPr>
         <a:solidFill>
-          <a:schemeClr val="bg1"/>
+          <a:schemeClr val="tx1"/>
         </a:solidFill>
         <a:effectLst/>
       </p:bgPr>
@@ -5179,10 +5204,18 @@
           <a:lstStyle/>
           <a:p>
             <a:r>
-              <a:rPr lang="en-US" b="1" dirty="0"/>
+              <a:rPr lang="en-US" b="1" dirty="0">
+                <a:solidFill>
+                  <a:srgbClr val="00B050"/>
+                </a:solidFill>
+              </a:rPr>
               <a:t>Insertion Sort</a:t>
             </a:r>
-            <a:endParaRPr lang="en-PH" b="1" dirty="0"/>
+            <a:endParaRPr lang="en-PH" b="1" dirty="0">
+              <a:solidFill>
+                <a:srgbClr val="00B050"/>
+              </a:solidFill>
+            </a:endParaRPr>
           </a:p>
         </p:txBody>
       </p:sp>
@@ -5564,7 +5597,7 @@
     <p:bg>
       <p:bgPr>
         <a:solidFill>
-          <a:schemeClr val="bg1"/>
+          <a:schemeClr val="tx1"/>
         </a:solidFill>
         <a:effectLst/>
       </p:bgPr>
@@ -5612,10 +5645,18 @@
           <a:lstStyle/>
           <a:p>
             <a:r>
-              <a:rPr lang="en-US" b="1" dirty="0"/>
+              <a:rPr lang="en-US" b="1" dirty="0">
+                <a:solidFill>
+                  <a:srgbClr val="00B050"/>
+                </a:solidFill>
+              </a:rPr>
               <a:t>Insertion Sort</a:t>
             </a:r>
-            <a:endParaRPr lang="en-PH" b="1" dirty="0"/>
+            <a:endParaRPr lang="en-PH" b="1" dirty="0">
+              <a:solidFill>
+                <a:srgbClr val="00B050"/>
+              </a:solidFill>
+            </a:endParaRPr>
           </a:p>
         </p:txBody>
       </p:sp>
@@ -6058,7 +6099,7 @@
     <p:bg>
       <p:bgPr>
         <a:solidFill>
-          <a:schemeClr val="bg1"/>
+          <a:schemeClr val="tx1"/>
         </a:solidFill>
         <a:effectLst/>
       </p:bgPr>
@@ -6106,10 +6147,18 @@
           <a:lstStyle/>
           <a:p>
             <a:r>
-              <a:rPr lang="en-US" b="1" dirty="0"/>
+              <a:rPr lang="en-US" b="1" dirty="0">
+                <a:solidFill>
+                  <a:srgbClr val="00B050"/>
+                </a:solidFill>
+              </a:rPr>
               <a:t>Insertion Sort</a:t>
             </a:r>
-            <a:endParaRPr lang="en-PH" b="1" dirty="0"/>
+            <a:endParaRPr lang="en-PH" b="1" dirty="0">
+              <a:solidFill>
+                <a:srgbClr val="00B050"/>
+              </a:solidFill>
+            </a:endParaRPr>
           </a:p>
         </p:txBody>
       </p:sp>
@@ -6598,7 +6647,7 @@
     <p:bg>
       <p:bgPr>
         <a:solidFill>
-          <a:schemeClr val="bg1"/>
+          <a:schemeClr val="tx1"/>
         </a:solidFill>
         <a:effectLst/>
       </p:bgPr>
@@ -6646,10 +6695,18 @@
           <a:lstStyle/>
           <a:p>
             <a:r>
-              <a:rPr lang="en-US" b="1" dirty="0"/>
+              <a:rPr lang="en-US" b="1" dirty="0">
+                <a:solidFill>
+                  <a:srgbClr val="00B050"/>
+                </a:solidFill>
+              </a:rPr>
               <a:t>Insertion Sort</a:t>
             </a:r>
-            <a:endParaRPr lang="en-PH" b="1" dirty="0"/>
+            <a:endParaRPr lang="en-PH" b="1" dirty="0">
+              <a:solidFill>
+                <a:srgbClr val="00B050"/>
+              </a:solidFill>
+            </a:endParaRPr>
           </a:p>
         </p:txBody>
       </p:sp>
@@ -7115,7 +7172,7 @@
     <p:bg>
       <p:bgPr>
         <a:solidFill>
-          <a:schemeClr val="bg1"/>
+          <a:schemeClr val="tx1"/>
         </a:solidFill>
         <a:effectLst/>
       </p:bgPr>
@@ -7163,10 +7220,18 @@
           <a:lstStyle/>
           <a:p>
             <a:r>
-              <a:rPr lang="en-US" b="1" dirty="0"/>
+              <a:rPr lang="en-US" b="1" dirty="0">
+                <a:solidFill>
+                  <a:srgbClr val="00B050"/>
+                </a:solidFill>
+              </a:rPr>
               <a:t>Insertion Sort</a:t>
             </a:r>
-            <a:endParaRPr lang="en-PH" b="1" dirty="0"/>
+            <a:endParaRPr lang="en-PH" b="1" dirty="0">
+              <a:solidFill>
+                <a:srgbClr val="00B050"/>
+              </a:solidFill>
+            </a:endParaRPr>
           </a:p>
         </p:txBody>
       </p:sp>
@@ -7609,7 +7674,7 @@
     <p:bg>
       <p:bgPr>
         <a:solidFill>
-          <a:schemeClr val="bg1"/>
+          <a:schemeClr val="tx1"/>
         </a:solidFill>
         <a:effectLst/>
       </p:bgPr>
@@ -7656,7 +7721,10 @@
           </a:prstGeom>
           <a:ln w="76200">
             <a:solidFill>
-              <a:schemeClr val="tx1"/>
+              <a:schemeClr val="tx1">
+                <a:lumMod val="50000"/>
+                <a:lumOff val="50000"/>
+              </a:schemeClr>
             </a:solidFill>
             <a:tailEnd type="triangle"/>
           </a:ln>
@@ -7700,7 +7768,10 @@
           </a:prstGeom>
           <a:ln w="76200">
             <a:solidFill>
-              <a:schemeClr val="tx1"/>
+              <a:schemeClr val="tx1">
+                <a:lumMod val="50000"/>
+                <a:lumOff val="50000"/>
+              </a:schemeClr>
             </a:solidFill>
             <a:tailEnd type="triangle"/>
           </a:ln>
@@ -7750,6 +7821,9 @@
           <a:p>
             <a:r>
               <a:rPr lang="en-PH" sz="4000" b="1" dirty="0">
+                <a:solidFill>
+                  <a:schemeClr val="bg1"/>
+                </a:solidFill>
                 <a:latin typeface="Consolas" panose="020B0609020204030204" pitchFamily="49" charset="0"/>
               </a:rPr>
               <a:t>data</a:t>
@@ -7787,6 +7861,9 @@
           <a:p>
             <a:r>
               <a:rPr lang="en-PH" sz="4000" b="1" dirty="0">
+                <a:solidFill>
+                  <a:schemeClr val="bg1"/>
+                </a:solidFill>
                 <a:latin typeface="Consolas" panose="020B0609020204030204" pitchFamily="49" charset="0"/>
               </a:rPr>
               <a:t>time</a:t>
@@ -8190,8 +8267,8 @@
           </a:p>
         </p:txBody>
       </p:sp>
-      <mc:AlternateContent xmlns:mc="http://schemas.openxmlformats.org/markup-compatibility/2006">
-        <mc:Choice xmlns:a14="http://schemas.microsoft.com/office/drawing/2010/main" Requires="a14">
+      <mc:AlternateContent xmlns:mc="http://schemas.openxmlformats.org/markup-compatibility/2006" xmlns:a14="http://schemas.microsoft.com/office/drawing/2010/main">
+        <mc:Choice Requires="a14">
           <p:sp>
             <p:nvSpPr>
               <p:cNvPr id="23" name="TextBox 22">
@@ -8280,7 +8357,7 @@
             </p:txBody>
           </p:sp>
         </mc:Choice>
-        <mc:Fallback>
+        <mc:Fallback xmlns="">
           <p:sp>
             <p:nvSpPr>
               <p:cNvPr id="23" name="TextBox 22">
@@ -8325,8 +8402,8 @@
           </p:sp>
         </mc:Fallback>
       </mc:AlternateContent>
-      <mc:AlternateContent xmlns:mc="http://schemas.openxmlformats.org/markup-compatibility/2006">
-        <mc:Choice xmlns:a14="http://schemas.microsoft.com/office/drawing/2010/main" Requires="a14">
+      <mc:AlternateContent xmlns:mc="http://schemas.openxmlformats.org/markup-compatibility/2006" xmlns:a14="http://schemas.microsoft.com/office/drawing/2010/main">
+        <mc:Choice Requires="a14">
           <p:sp>
             <p:nvSpPr>
               <p:cNvPr id="24" name="TextBox 23">
@@ -8460,7 +8537,7 @@
             </p:txBody>
           </p:sp>
         </mc:Choice>
-        <mc:Fallback>
+        <mc:Fallback xmlns="">
           <p:sp>
             <p:nvSpPr>
               <p:cNvPr id="24" name="TextBox 23">
@@ -9285,6 +9362,21 @@
 </file>
 
 <file path=customXml/item1.xml><?xml version="1.0" encoding="utf-8"?>
+<?mso-contentType ?>
+<FormTemplates xmlns="http://schemas.microsoft.com/sharepoint/v3/contenttype/forms">
+  <Display>DocumentLibraryForm</Display>
+  <Edit>DocumentLibraryForm</Edit>
+  <New>DocumentLibraryForm</New>
+</FormTemplates>
+</file>
+
+<file path=customXml/item2.xml><?xml version="1.0" encoding="utf-8"?>
+<p:properties xmlns:p="http://schemas.microsoft.com/office/2006/metadata/properties" xmlns:xsi="http://www.w3.org/2001/XMLSchema-instance" xmlns:pc="http://schemas.microsoft.com/office/infopath/2007/PartnerControls">
+  <documentManagement/>
+</p:properties>
+</file>
+
+<file path=customXml/item3.xml><?xml version="1.0" encoding="utf-8"?>
 <ct:contentTypeSchema xmlns:ct="http://schemas.microsoft.com/office/2006/metadata/contentType" xmlns:ma="http://schemas.microsoft.com/office/2006/metadata/properties/metaAttributes" ct:_="" ma:_="" ma:contentTypeName="Document" ma:contentTypeID="0x0101007188BDCA587B344BBA6CB1A93FAE6998" ma:contentTypeVersion="2" ma:contentTypeDescription="Create a new document." ma:contentTypeScope="" ma:versionID="7a8e4b6720badb2566a0cfeddfaf2856">
   <xsd:schema xmlns:xsd="http://www.w3.org/2001/XMLSchema" xmlns:xs="http://www.w3.org/2001/XMLSchema" xmlns:p="http://schemas.microsoft.com/office/2006/metadata/properties" xmlns:ns2="ba111d12-426d-4af0-bcb6-460e36974645" targetNamespace="http://schemas.microsoft.com/office/2006/metadata/properties" ma:root="true" ma:fieldsID="989b05398519136c88ba0a8d54e3c3da" ns2:_="">
     <xsd:import namespace="ba111d12-426d-4af0-bcb6-460e36974645"/>
@@ -9416,22 +9508,24 @@
 </ct:contentTypeSchema>
 </file>
 
-<file path=customXml/item2.xml><?xml version="1.0" encoding="utf-8"?>
-<p:properties xmlns:p="http://schemas.microsoft.com/office/2006/metadata/properties" xmlns:xsi="http://www.w3.org/2001/XMLSchema-instance" xmlns:pc="http://schemas.microsoft.com/office/infopath/2007/PartnerControls">
-  <documentManagement/>
-</p:properties>
+<file path=customXml/itemProps1.xml><?xml version="1.0" encoding="utf-8"?>
+<ds:datastoreItem xmlns:ds="http://schemas.openxmlformats.org/officeDocument/2006/customXml" ds:itemID="{651370AF-26B9-4AFA-BA9D-5D4A7E1A6722}">
+  <ds:schemaRefs>
+    <ds:schemaRef ds:uri="http://schemas.microsoft.com/sharepoint/v3/contenttype/forms"/>
+  </ds:schemaRefs>
+</ds:datastoreItem>
 </file>
 
-<file path=customXml/item3.xml><?xml version="1.0" encoding="utf-8"?>
-<?mso-contentType ?>
-<FormTemplates xmlns="http://schemas.microsoft.com/sharepoint/v3/contenttype/forms">
-  <Display>DocumentLibraryForm</Display>
-  <Edit>DocumentLibraryForm</Edit>
-  <New>DocumentLibraryForm</New>
-</FormTemplates>
+<file path=customXml/itemProps2.xml><?xml version="1.0" encoding="utf-8"?>
+<ds:datastoreItem xmlns:ds="http://schemas.openxmlformats.org/officeDocument/2006/customXml" ds:itemID="{EA3362E2-FA54-4262-AE94-2FA98FF8142D}">
+  <ds:schemaRefs>
+    <ds:schemaRef ds:uri="http://schemas.microsoft.com/office/2006/metadata/properties"/>
+    <ds:schemaRef ds:uri="http://schemas.microsoft.com/office/infopath/2007/PartnerControls"/>
+  </ds:schemaRefs>
+</ds:datastoreItem>
 </file>
 
-<file path=customXml/itemProps1.xml><?xml version="1.0" encoding="utf-8"?>
+<file path=customXml/itemProps3.xml><?xml version="1.0" encoding="utf-8"?>
 <ds:datastoreItem xmlns:ds="http://schemas.openxmlformats.org/officeDocument/2006/customXml" ds:itemID="{3D61E20B-708A-4719-8C02-DA91A478A7AB}">
   <ds:schemaRefs>
     <ds:schemaRef ds:uri="http://schemas.microsoft.com/office/2006/metadata/contentType"/>
@@ -9447,21 +9541,4 @@
     <ds:schemaRef ds:uri="http://schemas.microsoft.com/internal/obd"/>
   </ds:schemaRefs>
 </ds:datastoreItem>
-</file>
-
-<file path=customXml/itemProps2.xml><?xml version="1.0" encoding="utf-8"?>
-<ds:datastoreItem xmlns:ds="http://schemas.openxmlformats.org/officeDocument/2006/customXml" ds:itemID="{EA3362E2-FA54-4262-AE94-2FA98FF8142D}">
-  <ds:schemaRefs>
-    <ds:schemaRef ds:uri="http://schemas.microsoft.com/office/2006/metadata/properties"/>
-    <ds:schemaRef ds:uri="http://schemas.microsoft.com/office/infopath/2007/PartnerControls"/>
-  </ds:schemaRefs>
-</ds:datastoreItem>
-</file>
-
-<file path=customXml/itemProps3.xml><?xml version="1.0" encoding="utf-8"?>
-<ds:datastoreItem xmlns:ds="http://schemas.openxmlformats.org/officeDocument/2006/customXml" ds:itemID="{651370AF-26B9-4AFA-BA9D-5D4A7E1A6722}">
-  <ds:schemaRefs>
-    <ds:schemaRef ds:uri="http://schemas.microsoft.com/sharepoint/v3/contenttype/forms"/>
-  </ds:schemaRefs>
-</ds:datastoreItem>
 </file>